--- a/curso_es/pptx/S52.pptx
+++ b/curso_es/pptx/S52.pptx
@@ -3718,7 +3718,7 @@
                 </a:solidFill>
                 <a:latin typeface="Fredoka"/>
               </a:rPr>
-              <a:t>Caso 1 · La hora y media de Yasmin</a:t>
+              <a:t>Caso 1 · La hora y media de una chica</a:t>
             </a:r>
           </a:p>
         </p:txBody>
@@ -3800,7 +3800,7 @@
                 </a:solidFill>
                 <a:latin typeface="Nunito Sans"/>
               </a:rPr>
-              <a:t>Yasmin abre TikTok «un momento» antes de dormir y está hora y media. No ha decidido quedarse: simplemente no ha parado.</a:t>
+              <a:t>Una chica abre TikTok «un momento» antes de dormir y está hora y media. No ha decidido quedarse: simplemente no ha parado.</a:t>
             </a:r>
           </a:p>
         </p:txBody>
@@ -3898,7 +3898,7 @@
                 </a:solidFill>
                 <a:latin typeface="Nunito Sans"/>
               </a:rPr>
-              <a:t>Yasmin decidió abrir la app, pero no decidió quedarse tanto tiempo.</a:t>
+              <a:t>Esa chica decidió abrir la app, pero no decidió quedarse tanto tiempo.</a:t>
             </a:r>
           </a:p>
           <a:p>
@@ -4027,7 +4027,7 @@
                 </a:solidFill>
                 <a:latin typeface="Fredoka"/>
               </a:rPr>
-              <a:t>Caso 2 · Los sobres de Aitor</a:t>
+              <a:t>Caso 2 · Los sobres de un chico</a:t>
             </a:r>
           </a:p>
         </p:txBody>
@@ -4109,7 +4109,7 @@
                 </a:solidFill>
                 <a:latin typeface="Nunito Sans"/>
               </a:rPr>
-              <a:t>Aitor juega a un videojuego de fútbol. Compra sobres de jugadores con dinero real. En un mes gasta 60 € buscando un jugador que nunca le sale. (Inventado.)</a:t>
+              <a:t>Un chico juega a un videojuego de fútbol. Compra sobres de jugadores con dinero real. En un mes gasta 60 € buscando un jugador que nunca le sale. (Inventado.)</a:t>
             </a:r>
           </a:p>
         </p:txBody>
@@ -4418,7 +4418,7 @@
                 </a:solidFill>
                 <a:latin typeface="Nunito Sans"/>
               </a:rPr>
-              <a:t>Aitor lee una novela de misterio. Cada capítulo acaba en suspense y le cuesta dejarla: lee hasta las once.</a:t>
+              <a:t>Un chico lee una novela de misterio. Cada capítulo acaba en suspense y le cuesta dejarla: lee hasta las once.</a:t>
             </a:r>
           </a:p>
         </p:txBody>
@@ -4774,7 +4774,7 @@
                 </a:solidFill>
                 <a:latin typeface="Fredoka"/>
               </a:rPr>
-              <a:t>Frenos que funcionan</a:t>
+              <a:t>Lo que hacen algunas personas para decidir ellas (elige si te sirve alguno)</a:t>
             </a:r>
           </a:p>
         </p:txBody>
@@ -6054,7 +6054,7 @@
                 </a:solidFill>
                 <a:latin typeface="Nunito Sans"/>
               </a:rPr>
-              <a:t>El efecto Dunning-Kruger no dice que quien sabe poco se crea un ______.  (sesión 47)</a:t>
+              <a:t>Ojo: el estudio de 1999 no dice que quien sabe poco se crea un ______.  (sesión 47)</a:t>
             </a:r>
           </a:p>
         </p:txBody>
@@ -6292,7 +6292,7 @@
                 </a:solidFill>
                 <a:latin typeface="Nunito Sans"/>
               </a:rPr>
-              <a:t>El efecto Dunning-Kruger no dice que quien sabe poco se crea un </a:t>
+              <a:t>Ojo: el estudio de 1999 no dice que quien sabe poco se crea un </a:t>
             </a:r>
             <a:r>
               <a:rPr sz="2600" b="1">
@@ -6457,7 +6457,7 @@
                 </a:solidFill>
                 <a:latin typeface="Nunito Sans"/>
               </a:rPr>
-              <a:t>Yasmin abre TikTok «un momento» antes de dormir. Cuando mira la hora, ha pasado hora y media. No ha decidido quedarse: simplemente no ha parado.</a:t>
+              <a:t>Una chica abre TikTok «un momento» antes de dormir. Cuando mira la hora, ha pasado hora y media. No ha decidido quedarse: simplemente no ha parado.</a:t>
             </a:r>
           </a:p>
         </p:txBody>
@@ -6496,7 +6496,7 @@
                 </a:solidFill>
                 <a:latin typeface="Nunito Sans"/>
               </a:rPr>
-              <a:t>¿Quién ha decidido esa hora y media: Yasmin o la app?</a:t>
+              <a:t>¿Quién ha decidido esa hora y media: esa chica o la app?</a:t>
             </a:r>
           </a:p>
         </p:txBody>
